--- a/teacher/plan/graphrag-indexing-실습가이드.pptx
+++ b/teacher/plan/graphrag-indexing-실습가이드.pptx
@@ -4092,7 +4092,7 @@
               <a:buNone/>
             </a:pPr>
             <a:r>
-              <a:rPr lang="en-US" sz="1400" dirty="0">
+              <a:rPr lang="en-US" sz="1600" dirty="0">
                 <a:solidFill>
                   <a:srgbClr val="2B3242"/>
                 </a:solidFill>
@@ -4102,7 +4102,7 @@
               </a:rPr>
               <a:t>저장소 pull, Python 3.13</a:t>
             </a:r>
-            <a:endParaRPr lang="en-US" sz="1400" dirty="0"/>
+            <a:endParaRPr lang="en-US" sz="1600" dirty="0"/>
           </a:p>
         </p:txBody>
       </p:sp>
@@ -4219,7 +4219,7 @@
               <a:buNone/>
             </a:pPr>
             <a:r>
-              <a:rPr lang="en-US" sz="1400" dirty="0">
+              <a:rPr lang="en-US" sz="1600" dirty="0">
                 <a:solidFill>
                   <a:srgbClr val="2B3242"/>
                 </a:solidFill>
@@ -4229,7 +4229,7 @@
               </a:rPr>
               <a:t>RAG 실습 결과 rag/indexing/data/chroma 있음(없으면 강사 배포본)</a:t>
             </a:r>
-            <a:endParaRPr lang="en-US" sz="1400" dirty="0"/>
+            <a:endParaRPr lang="en-US" sz="1600" dirty="0"/>
           </a:p>
         </p:txBody>
       </p:sp>
@@ -4346,7 +4346,7 @@
               <a:buNone/>
             </a:pPr>
             <a:r>
-              <a:rPr lang="en-US" sz="1400" dirty="0">
+              <a:rPr lang="en-US" sz="1600" dirty="0">
                 <a:solidFill>
                   <a:srgbClr val="2B3242"/>
                 </a:solidFill>
@@ -4356,7 +4356,7 @@
               </a:rPr>
               <a:t>Docker로 Neo4j와 OpenSearch 기동(backing-services, healthy 확인)</a:t>
             </a:r>
-            <a:endParaRPr lang="en-US" sz="1400" dirty="0"/>
+            <a:endParaRPr lang="en-US" sz="1600" dirty="0"/>
           </a:p>
         </p:txBody>
       </p:sp>
@@ -4473,7 +4473,7 @@
               <a:buNone/>
             </a:pPr>
             <a:r>
-              <a:rPr lang="en-US" sz="1400" dirty="0">
+              <a:rPr lang="en-US" sz="1600" dirty="0">
                 <a:solidFill>
                   <a:srgbClr val="2B3242"/>
                 </a:solidFill>
@@ -4481,9 +4481,9 @@
                 <a:ea typeface="Pretendard" pitchFamily="34" charset="-122"/>
                 <a:cs typeface="Pretendard" pitchFamily="34" charset="-120"/>
               </a:rPr>
-              <a:t>가상환경 hands-on/solutions/graphrag/.venv 설치(README 3장)</a:t>
+              <a:t>graphrag 폴더에서 가상환경을 만들고 활성화, pip install -r requirements.txt</a:t>
             </a:r>
-            <a:endParaRPr lang="en-US" sz="1400" dirty="0"/>
+            <a:endParaRPr lang="en-US" sz="1600" dirty="0"/>
           </a:p>
         </p:txBody>
       </p:sp>
@@ -4600,7 +4600,7 @@
               <a:buNone/>
             </a:pPr>
             <a:r>
-              <a:rPr lang="en-US" sz="1400" dirty="0">
+              <a:rPr lang="en-US" sz="1600" dirty="0">
                 <a:solidFill>
                   <a:srgbClr val="2B3242"/>
                 </a:solidFill>
@@ -4610,7 +4610,7 @@
               </a:rPr>
               <a:t>secrets/.env에 GROQ_API_KEY, COHERE_API_KEY</a:t>
             </a:r>
-            <a:endParaRPr lang="en-US" sz="1400" dirty="0"/>
+            <a:endParaRPr lang="en-US" sz="1600" dirty="0"/>
           </a:p>
         </p:txBody>
       </p:sp>
@@ -4651,7 +4651,7 @@
                 <a:ea typeface="Pretendard" pitchFamily="34" charset="-122"/>
                 <a:cs typeface="Pretendard" pitchFamily="34" charset="-120"/>
               </a:rPr>
-              <a:t>수업용 명령 2개(indexer 폴더에서)</a:t>
+              <a:t>수업용 명령 2개(활성화 뒤 indexer 폴더에서)</a:t>
             </a:r>
             <a:endParaRPr lang="en-US" sz="1800" dirty="0"/>
           </a:p>
@@ -4701,7 +4701,7 @@
                 <a:ea typeface="Pretendard" pitchFamily="34" charset="-122"/>
                 <a:cs typeface="Pretendard" pitchFamily="34" charset="-120"/>
               </a:rPr>
-              <a:t>../.venv/Scripts/python.exe index_graph.py --run {별명}-s1 --sample</a:t>
+              <a:t>python index_graph.py --run {별명}-s1 --sample</a:t>
             </a:r>
             <a:endParaRPr lang="en-US" sz="1500" dirty="0"/>
           </a:p>
@@ -4741,7 +4741,7 @@
                 <a:ea typeface="Pretendard" pitchFamily="34" charset="-122"/>
                 <a:cs typeface="Pretendard" pitchFamily="34" charset="-120"/>
               </a:rPr>
-              <a:t>../.venv/Scripts/python.exe check_graph.py --qid Q09 --rerank</a:t>
+              <a:t>python check_graph.py --qid Q09 --rerank</a:t>
             </a:r>
             <a:endParaRPr lang="en-US" sz="1500" dirty="0"/>
           </a:p>
@@ -4761,7 +4761,7 @@
                 <a:ea typeface="Pretendard" pitchFamily="34" charset="-122"/>
                 <a:cs typeface="Pretendard" pitchFamily="34" charset="-120"/>
               </a:rPr>
-              <a:t>질문 하나로 검색엔진 → 청크 → 엔티티 → 커뮤니티 보고서 → 리랭크 → 적중 판정(macOS는 ../.venv/bin/python)</a:t>
+              <a:t>질문 하나로 검색엔진 → 청크 → 엔티티 → 커뮤니티 보고서 → 리랭크 → 적중 판정. 프롬프트에 (.venv)가 없으면 먼저 활성화</a:t>
             </a:r>
             <a:endParaRPr lang="en-US" sz="1500" dirty="0"/>
           </a:p>
